--- a/curso/pptx/S36.pptx
+++ b/curso/pptx/S36.pptx
@@ -7105,7 +7105,7 @@
                 </a:solidFill>
                 <a:latin typeface="Nunito Sans"/>
               </a:rPr>
-              <a:t>Esconde el dato: «No creerás lo que pasó»</a:t>
+              <a:t>隐藏关键信息：“你不会相信发生了什么”</a:t>
             </a:r>
           </a:p>
           <a:p>
@@ -7130,7 +7130,7 @@
                 </a:solidFill>
                 <a:latin typeface="Nunito Sans"/>
               </a:rPr>
-              <a:t>Exagera: «increíble», «brutal»; mayúsculas y exclamaciones</a:t>
+              <a:t>夸大：“难以置信”“太猛了”；大写字母和感叹号</a:t>
             </a:r>
           </a:p>
           <a:p>
@@ -7155,7 +7155,7 @@
                 </a:solidFill>
                 <a:latin typeface="Nunito Sans"/>
               </a:rPr>
-              <a:t>Pero un titular llamativo no siempre es clickbait</a:t>
+              <a:t>但是，吸引眼球的标题并不一定是标题党</a:t>
             </a:r>
           </a:p>
           <a:p>
@@ -7180,7 +7180,7 @@
                 </a:solidFill>
                 <a:latin typeface="Nunito Sans"/>
               </a:rPr>
-              <a:t>Antes de compartir, lee la noticia entera</a:t>
+              <a:t>分享之前，先把整篇新闻读完</a:t>
             </a:r>
           </a:p>
         </p:txBody>
@@ -7371,7 +7371,7 @@
                 </a:solidFill>
                 <a:latin typeface="Nunito Sans"/>
               </a:rPr>
-              <a:t>Ingredientes: urgencia, emoción fuerte, fuente vaga, sin fecha</a:t>
+              <a:t>常见成分：很紧急、情绪强烈、来源模糊、没有日期</a:t>
             </a:r>
           </a:p>
           <a:p>
@@ -7396,7 +7396,7 @@
                 </a:solidFill>
                 <a:latin typeface="Nunito Sans"/>
               </a:rPr>
-              <a:t>Son señales para sospechar, no pruebas</a:t>
+              <a:t>这些是让人起疑的信号，不是证据</a:t>
             </a:r>
           </a:p>
           <a:p>
@@ -7421,7 +7421,7 @@
                 </a:solidFill>
                 <a:latin typeface="Nunito Sans"/>
               </a:rPr>
-              <a:t>Lo compartimos porque nos emociona y viene de alguien de confianza</a:t>
+              <a:t>我们转发它，是因为它打动了我们，而且来自我们信任的人</a:t>
             </a:r>
           </a:p>
           <a:p>
@@ -7446,7 +7446,7 @@
                 </a:solidFill>
                 <a:latin typeface="Nunito Sans"/>
               </a:rPr>
-              <a:t>Una foto verdadera con un contexto falso también es bulo</a:t>
+              <a:t>真实的照片配上虚假的背景说明，也是谣言</a:t>
             </a:r>
           </a:p>
         </p:txBody>
